--- a/Presentation/2DGP 최종 프로젝트 발표.pptx
+++ b/Presentation/2DGP 최종 프로젝트 발표.pptx
@@ -5,11 +5,12 @@
     <p:sldMasterId id="2147483648" r:id="rId1"/>
   </p:sldMasterIdLst>
   <p:notesMasterIdLst>
-    <p:notesMasterId r:id="rId4"/>
+    <p:notesMasterId r:id="rId5"/>
   </p:notesMasterIdLst>
   <p:sldIdLst>
-    <p:sldId id="265" r:id="rId2"/>
-    <p:sldId id="266" r:id="rId3"/>
+    <p:sldId id="256" r:id="rId2"/>
+    <p:sldId id="265" r:id="rId3"/>
+    <p:sldId id="266" r:id="rId4"/>
   </p:sldIdLst>
   <p:sldSz cx="12192000" cy="6858000"/>
   <p:notesSz cx="6858000" cy="9144000"/>
@@ -198,7 +199,7 @@
           <a:p>
             <a:fld id="{EB06AD15-630C-4B8E-8C3F-9FFFAC0ED7E7}" type="datetimeFigureOut">
               <a:rPr lang="ko-KR" altLang="en-US" smtClean="0"/>
-              <a:t>2025-12-06</a:t>
+              <a:t>2025-12-08</a:t>
             </a:fld>
             <a:endParaRPr lang="ko-KR" altLang="en-US"/>
           </a:p>
@@ -509,7 +510,27 @@
           <a:bodyPr/>
           <a:lstStyle/>
           <a:p>
-            <a:endParaRPr lang="en-US" altLang="ko-KR" dirty="0"/>
+            <a:r>
+              <a:rPr lang="en-US" altLang="ko-KR" dirty="0"/>
+              <a:t>2d</a:t>
+            </a:r>
+            <a:r>
+              <a:rPr lang="ko-KR" altLang="en-US" dirty="0"/>
+              <a:t>게임 프로그래밍 </a:t>
+            </a:r>
+            <a:r>
+              <a:rPr lang="en-US" altLang="ko-KR" dirty="0"/>
+              <a:t>2</a:t>
+            </a:r>
+            <a:r>
+              <a:rPr lang="ko-KR" altLang="en-US" dirty="0"/>
+              <a:t>차 프로젝트 발표를 시작하겠습니다</a:t>
+            </a:r>
+            <a:r>
+              <a:rPr lang="en-US" altLang="ko-KR" dirty="0"/>
+              <a:t>.</a:t>
+            </a:r>
+            <a:endParaRPr lang="ko-KR" altLang="en-US" dirty="0"/>
           </a:p>
         </p:txBody>
       </p:sp>
@@ -539,7 +560,7 @@
     </p:spTree>
     <p:extLst>
       <p:ext uri="{BB962C8B-B14F-4D97-AF65-F5344CB8AC3E}">
-        <p14:creationId xmlns:p14="http://schemas.microsoft.com/office/powerpoint/2010/main" val="1327539098"/>
+        <p14:creationId xmlns:p14="http://schemas.microsoft.com/office/powerpoint/2010/main" val="31953972"/>
       </p:ext>
     </p:extLst>
   </p:cSld>
@@ -593,7 +614,7 @@
           <a:bodyPr/>
           <a:lstStyle/>
           <a:p>
-            <a:endParaRPr lang="ko-KR" altLang="en-US" dirty="0"/>
+            <a:endParaRPr lang="en-US" altLang="ko-KR" dirty="0"/>
           </a:p>
         </p:txBody>
       </p:sp>
@@ -615,6 +636,90 @@
             <a:fld id="{BDFD880C-52BD-43A5-B06E-CC292C3E72EC}" type="slidenum">
               <a:rPr lang="ko-KR" altLang="en-US" smtClean="0"/>
               <a:t>2</a:t>
+            </a:fld>
+            <a:endParaRPr lang="ko-KR" altLang="en-US"/>
+          </a:p>
+        </p:txBody>
+      </p:sp>
+    </p:spTree>
+    <p:extLst>
+      <p:ext uri="{BB962C8B-B14F-4D97-AF65-F5344CB8AC3E}">
+        <p14:creationId xmlns:p14="http://schemas.microsoft.com/office/powerpoint/2010/main" val="1327539098"/>
+      </p:ext>
+    </p:extLst>
+  </p:cSld>
+  <p:clrMapOvr>
+    <a:masterClrMapping/>
+  </p:clrMapOvr>
+</p:notes>
+</file>
+
+<file path=ppt/notesSlides/notesSlide3.xml><?xml version="1.0" encoding="utf-8"?>
+<p:notes xmlns:a="http://schemas.openxmlformats.org/drawingml/2006/main" xmlns:r="http://schemas.openxmlformats.org/officeDocument/2006/relationships" xmlns:p="http://schemas.openxmlformats.org/presentationml/2006/main">
+  <p:cSld>
+    <p:spTree>
+      <p:nvGrpSpPr>
+        <p:cNvPr id="1" name=""/>
+        <p:cNvGrpSpPr/>
+        <p:nvPr/>
+      </p:nvGrpSpPr>
+      <p:grpSpPr>
+        <a:xfrm>
+          <a:off x="0" y="0"/>
+          <a:ext cx="0" cy="0"/>
+          <a:chOff x="0" y="0"/>
+          <a:chExt cx="0" cy="0"/>
+        </a:xfrm>
+      </p:grpSpPr>
+      <p:sp>
+        <p:nvSpPr>
+          <p:cNvPr id="2" name="슬라이드 이미지 개체 틀 1"/>
+          <p:cNvSpPr>
+            <a:spLocks noGrp="1" noRot="1" noChangeAspect="1"/>
+          </p:cNvSpPr>
+          <p:nvPr>
+            <p:ph type="sldImg"/>
+          </p:nvPr>
+        </p:nvSpPr>
+        <p:spPr/>
+      </p:sp>
+      <p:sp>
+        <p:nvSpPr>
+          <p:cNvPr id="3" name="슬라이드 노트 개체 틀 2"/>
+          <p:cNvSpPr>
+            <a:spLocks noGrp="1"/>
+          </p:cNvSpPr>
+          <p:nvPr>
+            <p:ph type="body" idx="1"/>
+          </p:nvPr>
+        </p:nvSpPr>
+        <p:spPr/>
+        <p:txBody>
+          <a:bodyPr/>
+          <a:lstStyle/>
+          <a:p>
+            <a:endParaRPr lang="ko-KR" altLang="en-US" dirty="0"/>
+          </a:p>
+        </p:txBody>
+      </p:sp>
+      <p:sp>
+        <p:nvSpPr>
+          <p:cNvPr id="4" name="슬라이드 번호 개체 틀 3"/>
+          <p:cNvSpPr>
+            <a:spLocks noGrp="1"/>
+          </p:cNvSpPr>
+          <p:nvPr>
+            <p:ph type="sldNum" sz="quarter" idx="5"/>
+          </p:nvPr>
+        </p:nvSpPr>
+        <p:spPr/>
+        <p:txBody>
+          <a:bodyPr/>
+          <a:lstStyle/>
+          <a:p>
+            <a:fld id="{BDFD880C-52BD-43A5-B06E-CC292C3E72EC}" type="slidenum">
+              <a:rPr lang="ko-KR" altLang="en-US" smtClean="0"/>
+              <a:t>3</a:t>
             </a:fld>
             <a:endParaRPr lang="ko-KR" altLang="en-US"/>
           </a:p>
@@ -780,7 +885,7 @@
           <a:p>
             <a:fld id="{0E98DAB2-B839-433B-B9AD-13CAA62C5852}" type="datetimeFigureOut">
               <a:rPr lang="ko-KR" altLang="en-US" smtClean="0"/>
-              <a:t>2025-12-06</a:t>
+              <a:t>2025-12-08</a:t>
             </a:fld>
             <a:endParaRPr lang="ko-KR" altLang="en-US"/>
           </a:p>
@@ -978,7 +1083,7 @@
           <a:p>
             <a:fld id="{0E98DAB2-B839-433B-B9AD-13CAA62C5852}" type="datetimeFigureOut">
               <a:rPr lang="ko-KR" altLang="en-US" smtClean="0"/>
-              <a:t>2025-12-06</a:t>
+              <a:t>2025-12-08</a:t>
             </a:fld>
             <a:endParaRPr lang="ko-KR" altLang="en-US"/>
           </a:p>
@@ -1186,7 +1291,7 @@
           <a:p>
             <a:fld id="{0E98DAB2-B839-433B-B9AD-13CAA62C5852}" type="datetimeFigureOut">
               <a:rPr lang="ko-KR" altLang="en-US" smtClean="0"/>
-              <a:t>2025-12-06</a:t>
+              <a:t>2025-12-08</a:t>
             </a:fld>
             <a:endParaRPr lang="ko-KR" altLang="en-US"/>
           </a:p>
@@ -1384,7 +1489,7 @@
           <a:p>
             <a:fld id="{0E98DAB2-B839-433B-B9AD-13CAA62C5852}" type="datetimeFigureOut">
               <a:rPr lang="ko-KR" altLang="en-US" smtClean="0"/>
-              <a:t>2025-12-06</a:t>
+              <a:t>2025-12-08</a:t>
             </a:fld>
             <a:endParaRPr lang="ko-KR" altLang="en-US"/>
           </a:p>
@@ -1659,7 +1764,7 @@
           <a:p>
             <a:fld id="{0E98DAB2-B839-433B-B9AD-13CAA62C5852}" type="datetimeFigureOut">
               <a:rPr lang="ko-KR" altLang="en-US" smtClean="0"/>
-              <a:t>2025-12-06</a:t>
+              <a:t>2025-12-08</a:t>
             </a:fld>
             <a:endParaRPr lang="ko-KR" altLang="en-US"/>
           </a:p>
@@ -1924,7 +2029,7 @@
           <a:p>
             <a:fld id="{0E98DAB2-B839-433B-B9AD-13CAA62C5852}" type="datetimeFigureOut">
               <a:rPr lang="ko-KR" altLang="en-US" smtClean="0"/>
-              <a:t>2025-12-06</a:t>
+              <a:t>2025-12-08</a:t>
             </a:fld>
             <a:endParaRPr lang="ko-KR" altLang="en-US"/>
           </a:p>
@@ -2336,7 +2441,7 @@
           <a:p>
             <a:fld id="{0E98DAB2-B839-433B-B9AD-13CAA62C5852}" type="datetimeFigureOut">
               <a:rPr lang="ko-KR" altLang="en-US" smtClean="0"/>
-              <a:t>2025-12-06</a:t>
+              <a:t>2025-12-08</a:t>
             </a:fld>
             <a:endParaRPr lang="ko-KR" altLang="en-US"/>
           </a:p>
@@ -2477,7 +2582,7 @@
           <a:p>
             <a:fld id="{0E98DAB2-B839-433B-B9AD-13CAA62C5852}" type="datetimeFigureOut">
               <a:rPr lang="ko-KR" altLang="en-US" smtClean="0"/>
-              <a:t>2025-12-06</a:t>
+              <a:t>2025-12-08</a:t>
             </a:fld>
             <a:endParaRPr lang="ko-KR" altLang="en-US"/>
           </a:p>
@@ -2590,7 +2695,7 @@
           <a:p>
             <a:fld id="{0E98DAB2-B839-433B-B9AD-13CAA62C5852}" type="datetimeFigureOut">
               <a:rPr lang="ko-KR" altLang="en-US" smtClean="0"/>
-              <a:t>2025-12-06</a:t>
+              <a:t>2025-12-08</a:t>
             </a:fld>
             <a:endParaRPr lang="ko-KR" altLang="en-US"/>
           </a:p>
@@ -2901,7 +3006,7 @@
           <a:p>
             <a:fld id="{0E98DAB2-B839-433B-B9AD-13CAA62C5852}" type="datetimeFigureOut">
               <a:rPr lang="ko-KR" altLang="en-US" smtClean="0"/>
-              <a:t>2025-12-06</a:t>
+              <a:t>2025-12-08</a:t>
             </a:fld>
             <a:endParaRPr lang="ko-KR" altLang="en-US"/>
           </a:p>
@@ -3189,7 +3294,7 @@
           <a:p>
             <a:fld id="{0E98DAB2-B839-433B-B9AD-13CAA62C5852}" type="datetimeFigureOut">
               <a:rPr lang="ko-KR" altLang="en-US" smtClean="0"/>
-              <a:t>2025-12-06</a:t>
+              <a:t>2025-12-08</a:t>
             </a:fld>
             <a:endParaRPr lang="ko-KR" altLang="en-US"/>
           </a:p>
@@ -3430,7 +3535,7 @@
           <a:p>
             <a:fld id="{0E98DAB2-B839-433B-B9AD-13CAA62C5852}" type="datetimeFigureOut">
               <a:rPr lang="ko-KR" altLang="en-US" smtClean="0"/>
-              <a:t>2025-12-06</a:t>
+              <a:t>2025-12-08</a:t>
             </a:fld>
             <a:endParaRPr lang="ko-KR" altLang="en-US"/>
           </a:p>
@@ -3852,6 +3957,144 @@
           <p:cNvPr id="2" name="제목 1">
             <a:extLst>
               <a:ext uri="{FF2B5EF4-FFF2-40B4-BE49-F238E27FC236}">
+                <a16:creationId xmlns:a16="http://schemas.microsoft.com/office/drawing/2014/main" id="{423DC1F4-DB01-7418-0384-7ACB5DEF17D3}"/>
+              </a:ext>
+            </a:extLst>
+          </p:cNvPr>
+          <p:cNvSpPr>
+            <a:spLocks noGrp="1"/>
+          </p:cNvSpPr>
+          <p:nvPr>
+            <p:ph type="ctrTitle"/>
+          </p:nvPr>
+        </p:nvSpPr>
+        <p:spPr/>
+        <p:txBody>
+          <a:bodyPr/>
+          <a:lstStyle/>
+          <a:p>
+            <a:r>
+              <a:rPr lang="en-US" altLang="ko-KR" dirty="0">
+                <a:latin typeface="+mj-ea"/>
+              </a:rPr>
+              <a:t>2DGP</a:t>
+            </a:r>
+            <a:r>
+              <a:rPr lang="ko-KR" altLang="en-US" dirty="0">
+                <a:latin typeface="+mj-ea"/>
+              </a:rPr>
+              <a:t> 최종</a:t>
+            </a:r>
+            <a:r>
+              <a:rPr lang="en-US" altLang="ko-KR" dirty="0">
+                <a:latin typeface="+mj-ea"/>
+              </a:rPr>
+              <a:t> </a:t>
+            </a:r>
+            <a:r>
+              <a:rPr lang="ko-KR" altLang="en-US" dirty="0">
+                <a:latin typeface="+mj-ea"/>
+              </a:rPr>
+              <a:t>프로젝트 발표</a:t>
+            </a:r>
+          </a:p>
+        </p:txBody>
+      </p:sp>
+      <p:sp>
+        <p:nvSpPr>
+          <p:cNvPr id="3" name="부제목 2">
+            <a:extLst>
+              <a:ext uri="{FF2B5EF4-FFF2-40B4-BE49-F238E27FC236}">
+                <a16:creationId xmlns:a16="http://schemas.microsoft.com/office/drawing/2014/main" id="{EEEA3513-9E91-EADF-D4DC-46B151267822}"/>
+              </a:ext>
+            </a:extLst>
+          </p:cNvPr>
+          <p:cNvSpPr>
+            <a:spLocks noGrp="1"/>
+          </p:cNvSpPr>
+          <p:nvPr>
+            <p:ph type="subTitle" idx="1"/>
+          </p:nvPr>
+        </p:nvSpPr>
+        <p:spPr/>
+        <p:txBody>
+          <a:bodyPr/>
+          <a:lstStyle/>
+          <a:p>
+            <a:endParaRPr lang="en-US" altLang="ko-KR" dirty="0">
+              <a:latin typeface="Neo둥근모 Pro" panose="02010503060201040203" pitchFamily="2" charset="-127"/>
+              <a:ea typeface="Neo둥근모 Pro" panose="02010503060201040203" pitchFamily="2" charset="-127"/>
+            </a:endParaRPr>
+          </a:p>
+          <a:p>
+            <a:r>
+              <a:rPr lang="en-US" altLang="ko-KR" dirty="0">
+                <a:latin typeface="Neo둥근모 Pro" panose="02010503060201040203" pitchFamily="2" charset="-127"/>
+                <a:ea typeface="Neo둥근모 Pro" panose="02010503060201040203" pitchFamily="2" charset="-127"/>
+              </a:rPr>
+              <a:t>Wall World</a:t>
+            </a:r>
+          </a:p>
+          <a:p>
+            <a:r>
+              <a:rPr lang="ko-KR" altLang="en-US" dirty="0">
+                <a:latin typeface="학교안심 받아쓰기 TTF L" panose="02000403000000000000" pitchFamily="2" charset="-127"/>
+                <a:ea typeface="학교안심 받아쓰기 TTF L" panose="02000403000000000000" pitchFamily="2" charset="-127"/>
+              </a:rPr>
+              <a:t>게임공학과 </a:t>
+            </a:r>
+            <a:r>
+              <a:rPr lang="en-US" altLang="ko-KR" dirty="0">
+                <a:latin typeface="학교안심 받아쓰기 TTF L" panose="02000403000000000000" pitchFamily="2" charset="-127"/>
+                <a:ea typeface="학교안심 받아쓰기 TTF L" panose="02000403000000000000" pitchFamily="2" charset="-127"/>
+              </a:rPr>
+              <a:t>2022182025 </a:t>
+            </a:r>
+            <a:r>
+              <a:rPr lang="ko-KR" altLang="en-US" dirty="0">
+                <a:latin typeface="학교안심 받아쓰기 TTF L" panose="02000403000000000000" pitchFamily="2" charset="-127"/>
+                <a:ea typeface="학교안심 받아쓰기 TTF L" panose="02000403000000000000" pitchFamily="2" charset="-127"/>
+              </a:rPr>
+              <a:t>윤지훈</a:t>
+            </a:r>
+          </a:p>
+        </p:txBody>
+      </p:sp>
+    </p:spTree>
+    <p:extLst>
+      <p:ext uri="{BB962C8B-B14F-4D97-AF65-F5344CB8AC3E}">
+        <p14:creationId xmlns:p14="http://schemas.microsoft.com/office/powerpoint/2010/main" val="2760282792"/>
+      </p:ext>
+    </p:extLst>
+  </p:cSld>
+  <p:clrMapOvr>
+    <a:masterClrMapping/>
+  </p:clrMapOvr>
+</p:sld>
+</file>
+
+<file path=ppt/slides/slide2.xml><?xml version="1.0" encoding="utf-8"?>
+<p:sld xmlns:a="http://schemas.openxmlformats.org/drawingml/2006/main" xmlns:r="http://schemas.openxmlformats.org/officeDocument/2006/relationships" xmlns:p="http://schemas.openxmlformats.org/presentationml/2006/main">
+  <p:cSld>
+    <p:spTree>
+      <p:nvGrpSpPr>
+        <p:cNvPr id="1" name=""/>
+        <p:cNvGrpSpPr/>
+        <p:nvPr/>
+      </p:nvGrpSpPr>
+      <p:grpSpPr>
+        <a:xfrm>
+          <a:off x="0" y="0"/>
+          <a:ext cx="0" cy="0"/>
+          <a:chOff x="0" y="0"/>
+          <a:chExt cx="0" cy="0"/>
+        </a:xfrm>
+      </p:grpSpPr>
+      <p:sp>
+        <p:nvSpPr>
+          <p:cNvPr id="2" name="제목 1">
+            <a:extLst>
+              <a:ext uri="{FF2B5EF4-FFF2-40B4-BE49-F238E27FC236}">
                 <a16:creationId xmlns:a16="http://schemas.microsoft.com/office/drawing/2014/main" id="{ED788CFE-2D36-90B7-731B-D61501E92732}"/>
               </a:ext>
             </a:extLst>
@@ -5341,7 +5584,7 @@
 </p:sld>
 </file>
 
-<file path=ppt/slides/slide2.xml><?xml version="1.0" encoding="utf-8"?>
+<file path=ppt/slides/slide3.xml><?xml version="1.0" encoding="utf-8"?>
 <p:sld xmlns:a="http://schemas.openxmlformats.org/drawingml/2006/main" xmlns:r="http://schemas.openxmlformats.org/officeDocument/2006/relationships" xmlns:p="http://schemas.openxmlformats.org/presentationml/2006/main">
   <p:cSld>
     <p:spTree>
